--- a/presentation/religio-pro.pptx
+++ b/presentation/religio-pro.pptx
@@ -3253,12 +3253,20 @@
           </a:p>
         </p:txBody>
       </p:sp>
-      <p:sp>
-        <p:nvSpPr>
-          <p:cNvPr id="7" name="Shape 5"/>
-          <p:cNvSpPr/>
-          <p:nvPr/>
-        </p:nvSpPr>
+      <p:pic>
+        <p:nvPicPr>
+          <p:cNvPr id="7" name="Image 0" descr="C:\Users\Galih Sidik\travel\presentation\screenshots\05-admin-overview.png">    </p:cNvPr>
+          <p:cNvPicPr>
+            <a:picLocks noChangeAspect="1"/>
+          </p:cNvPicPr>
+          <p:nvPr/>
+        </p:nvPicPr>
+        <p:blipFill>
+          <a:blip r:embed="rId1"/>
+          <a:stretch>
+            <a:fillRect/>
+          </a:stretch>
+        </p:blipFill>
         <p:spPr>
           <a:xfrm>
             <a:off x="6675120" y="2194560"/>
@@ -3267,116 +3275,11 @@
           <a:prstGeom prst="rect">
             <a:avLst/>
           </a:prstGeom>
-          <a:solidFill>
-            <a:srgbClr val="11100E"/>
-          </a:solidFill>
-          <a:ln w="12700">
-            <a:solidFill>
-              <a:srgbClr val="3A3630"/>
-            </a:solidFill>
-            <a:prstDash val="dash"/>
-          </a:ln>
-        </p:spPr>
-      </p:sp>
-      <p:sp>
-        <p:nvSpPr>
-          <p:cNvPr id="8" name="Text 6"/>
-          <p:cNvSpPr/>
-          <p:nvPr/>
-        </p:nvSpPr>
-        <p:spPr>
-          <a:xfrm>
-            <a:off x="6858000" y="3383280"/>
-            <a:ext cx="4572000" cy="1097280"/>
-          </a:xfrm>
-          <a:prstGeom prst="rect">
-            <a:avLst/>
-          </a:prstGeom>
-          <a:noFill/>
-          <a:ln/>
-        </p:spPr>
-        <p:txBody>
-          <a:bodyPr wrap="square" rtlCol="0" anchor="ctr"/>
-          <a:lstStyle/>
-          <a:p>
-            <a:pPr algn="ctr" indent="0" marL="0">
-              <a:buNone/>
-            </a:pPr>
-            <a:r>
-              <a:rPr lang="en-US" sz="1100" spc="100" kern="0" dirty="0">
-                <a:solidFill>
-                  <a:srgbClr val="8E8676"/>
-                </a:solidFill>
-                <a:latin typeface="Consolas" pitchFamily="34" charset="0"/>
-                <a:ea typeface="Consolas" pitchFamily="34" charset="-122"/>
-                <a:cs typeface="Consolas" pitchFamily="34" charset="-120"/>
-              </a:rPr>
-              <a:t>📸 SCREENSHOT</a:t>
-            </a:r>
-            <a:endParaRPr lang="en-US" sz="1100" dirty="0"/>
-          </a:p>
-          <a:p>
-            <a:pPr algn="ctr" indent="0" marL="0">
-              <a:buNone/>
-            </a:pPr>
-            <a:r>
-              <a:rPr lang="en-US" sz="1100" spc="100" kern="0" dirty="0">
-                <a:solidFill>
-                  <a:srgbClr val="8E8676"/>
-                </a:solidFill>
-                <a:latin typeface="Consolas" pitchFamily="34" charset="0"/>
-                <a:ea typeface="Consolas" pitchFamily="34" charset="-122"/>
-                <a:cs typeface="Consolas" pitchFamily="34" charset="-120"/>
-              </a:rPr>
-              <a:t>05-admin-overview.png</a:t>
-            </a:r>
-            <a:endParaRPr lang="en-US" sz="1100" dirty="0"/>
-          </a:p>
-          <a:p>
-            <a:pPr algn="ctr" indent="0" marL="0">
-              <a:buNone/>
-            </a:pPr>
-            <a:endParaRPr lang="en-US" sz="1100" dirty="0"/>
-          </a:p>
-          <a:p>
-            <a:pPr algn="ctr" indent="0" marL="0">
-              <a:buNone/>
-            </a:pPr>
-            <a:r>
-              <a:rPr lang="en-US" sz="1100" spc="100" kern="0" dirty="0">
-                <a:solidFill>
-                  <a:srgbClr val="8E8676"/>
-                </a:solidFill>
-                <a:latin typeface="Consolas" pitchFamily="34" charset="0"/>
-                <a:ea typeface="Consolas" pitchFamily="34" charset="-122"/>
-                <a:cs typeface="Consolas" pitchFamily="34" charset="-120"/>
-              </a:rPr>
-              <a:t>Drop file into</a:t>
-            </a:r>
-            <a:endParaRPr lang="en-US" sz="1100" dirty="0"/>
-          </a:p>
-          <a:p>
-            <a:pPr algn="ctr" indent="0" marL="0">
-              <a:buNone/>
-            </a:pPr>
-            <a:r>
-              <a:rPr lang="en-US" sz="1100" spc="100" kern="0" dirty="0">
-                <a:solidFill>
-                  <a:srgbClr val="8E8676"/>
-                </a:solidFill>
-                <a:latin typeface="Consolas" pitchFamily="34" charset="0"/>
-                <a:ea typeface="Consolas" pitchFamily="34" charset="-122"/>
-                <a:cs typeface="Consolas" pitchFamily="34" charset="-120"/>
-              </a:rPr>
-              <a:t>presentation/screenshots/</a:t>
-            </a:r>
-            <a:endParaRPr lang="en-US" sz="1100" dirty="0"/>
-          </a:p>
-        </p:txBody>
-      </p:sp>
-      <p:sp>
-        <p:nvSpPr>
-          <p:cNvPr id="9" name="Text 7"/>
+        </p:spPr>
+      </p:pic>
+      <p:sp>
+        <p:nvSpPr>
+          <p:cNvPr id="8" name="Text 5"/>
           <p:cNvSpPr/>
           <p:nvPr/>
         </p:nvSpPr>
@@ -3415,7 +3318,7 @@
       </p:sp>
       <p:sp>
         <p:nvSpPr>
-          <p:cNvPr id="10" name="Text 8"/>
+          <p:cNvPr id="9" name="Text 6"/>
           <p:cNvSpPr/>
           <p:nvPr/>
         </p:nvSpPr>
@@ -3454,7 +3357,7 @@
       </p:sp>
       <p:sp>
         <p:nvSpPr>
-          <p:cNvPr id="11" name="Text 9"/>
+          <p:cNvPr id="10" name="Text 7"/>
           <p:cNvSpPr/>
           <p:nvPr/>
         </p:nvSpPr>
@@ -4221,12 +4124,20 @@
           </a:p>
         </p:txBody>
       </p:sp>
-      <p:sp>
-        <p:nvSpPr>
-          <p:cNvPr id="7" name="Shape 5"/>
-          <p:cNvSpPr/>
-          <p:nvPr/>
-        </p:nvSpPr>
+      <p:pic>
+        <p:nvPicPr>
+          <p:cNvPr id="7" name="Image 0" descr="C:\Users\Galih Sidik\travel\presentation\screenshots\06-mobile-pwa.png">    </p:cNvPr>
+          <p:cNvPicPr>
+            <a:picLocks noChangeAspect="1"/>
+          </p:cNvPicPr>
+          <p:nvPr/>
+        </p:nvPicPr>
+        <p:blipFill>
+          <a:blip r:embed="rId1"/>
+          <a:stretch>
+            <a:fillRect/>
+          </a:stretch>
+        </p:blipFill>
         <p:spPr>
           <a:xfrm>
             <a:off x="6675120" y="2194560"/>
@@ -4235,116 +4146,11 @@
           <a:prstGeom prst="rect">
             <a:avLst/>
           </a:prstGeom>
-          <a:solidFill>
-            <a:srgbClr val="11100E"/>
-          </a:solidFill>
-          <a:ln w="12700">
-            <a:solidFill>
-              <a:srgbClr val="3A3630"/>
-            </a:solidFill>
-            <a:prstDash val="dash"/>
-          </a:ln>
-        </p:spPr>
-      </p:sp>
-      <p:sp>
-        <p:nvSpPr>
-          <p:cNvPr id="8" name="Text 6"/>
-          <p:cNvSpPr/>
-          <p:nvPr/>
-        </p:nvSpPr>
-        <p:spPr>
-          <a:xfrm>
-            <a:off x="6858000" y="3383280"/>
-            <a:ext cx="4572000" cy="1097280"/>
-          </a:xfrm>
-          <a:prstGeom prst="rect">
-            <a:avLst/>
-          </a:prstGeom>
-          <a:noFill/>
-          <a:ln/>
-        </p:spPr>
-        <p:txBody>
-          <a:bodyPr wrap="square" rtlCol="0" anchor="ctr"/>
-          <a:lstStyle/>
-          <a:p>
-            <a:pPr algn="ctr" indent="0" marL="0">
-              <a:buNone/>
-            </a:pPr>
-            <a:r>
-              <a:rPr lang="en-US" sz="1100" spc="100" kern="0" dirty="0">
-                <a:solidFill>
-                  <a:srgbClr val="8E8676"/>
-                </a:solidFill>
-                <a:latin typeface="Consolas" pitchFamily="34" charset="0"/>
-                <a:ea typeface="Consolas" pitchFamily="34" charset="-122"/>
-                <a:cs typeface="Consolas" pitchFamily="34" charset="-120"/>
-              </a:rPr>
-              <a:t>📸 SCREENSHOT</a:t>
-            </a:r>
-            <a:endParaRPr lang="en-US" sz="1100" dirty="0"/>
-          </a:p>
-          <a:p>
-            <a:pPr algn="ctr" indent="0" marL="0">
-              <a:buNone/>
-            </a:pPr>
-            <a:r>
-              <a:rPr lang="en-US" sz="1100" spc="100" kern="0" dirty="0">
-                <a:solidFill>
-                  <a:srgbClr val="8E8676"/>
-                </a:solidFill>
-                <a:latin typeface="Consolas" pitchFamily="34" charset="0"/>
-                <a:ea typeface="Consolas" pitchFamily="34" charset="-122"/>
-                <a:cs typeface="Consolas" pitchFamily="34" charset="-120"/>
-              </a:rPr>
-              <a:t>06-mobile-pwa.png</a:t>
-            </a:r>
-            <a:endParaRPr lang="en-US" sz="1100" dirty="0"/>
-          </a:p>
-          <a:p>
-            <a:pPr algn="ctr" indent="0" marL="0">
-              <a:buNone/>
-            </a:pPr>
-            <a:endParaRPr lang="en-US" sz="1100" dirty="0"/>
-          </a:p>
-          <a:p>
-            <a:pPr algn="ctr" indent="0" marL="0">
-              <a:buNone/>
-            </a:pPr>
-            <a:r>
-              <a:rPr lang="en-US" sz="1100" spc="100" kern="0" dirty="0">
-                <a:solidFill>
-                  <a:srgbClr val="8E8676"/>
-                </a:solidFill>
-                <a:latin typeface="Consolas" pitchFamily="34" charset="0"/>
-                <a:ea typeface="Consolas" pitchFamily="34" charset="-122"/>
-                <a:cs typeface="Consolas" pitchFamily="34" charset="-120"/>
-              </a:rPr>
-              <a:t>Drop file into</a:t>
-            </a:r>
-            <a:endParaRPr lang="en-US" sz="1100" dirty="0"/>
-          </a:p>
-          <a:p>
-            <a:pPr algn="ctr" indent="0" marL="0">
-              <a:buNone/>
-            </a:pPr>
-            <a:r>
-              <a:rPr lang="en-US" sz="1100" spc="100" kern="0" dirty="0">
-                <a:solidFill>
-                  <a:srgbClr val="8E8676"/>
-                </a:solidFill>
-                <a:latin typeface="Consolas" pitchFamily="34" charset="0"/>
-                <a:ea typeface="Consolas" pitchFamily="34" charset="-122"/>
-                <a:cs typeface="Consolas" pitchFamily="34" charset="-120"/>
-              </a:rPr>
-              <a:t>presentation/screenshots/</a:t>
-            </a:r>
-            <a:endParaRPr lang="en-US" sz="1100" dirty="0"/>
-          </a:p>
-        </p:txBody>
-      </p:sp>
-      <p:sp>
-        <p:nvSpPr>
-          <p:cNvPr id="9" name="Text 7"/>
+        </p:spPr>
+      </p:pic>
+      <p:sp>
+        <p:nvSpPr>
+          <p:cNvPr id="8" name="Text 5"/>
           <p:cNvSpPr/>
           <p:nvPr/>
         </p:nvSpPr>
@@ -4383,7 +4189,7 @@
       </p:sp>
       <p:sp>
         <p:nvSpPr>
-          <p:cNvPr id="10" name="Text 8"/>
+          <p:cNvPr id="9" name="Text 6"/>
           <p:cNvSpPr/>
           <p:nvPr/>
         </p:nvSpPr>
@@ -4422,7 +4228,7 @@
       </p:sp>
       <p:sp>
         <p:nvSpPr>
-          <p:cNvPr id="11" name="Text 9"/>
+          <p:cNvPr id="10" name="Text 7"/>
           <p:cNvSpPr/>
           <p:nvPr/>
         </p:nvSpPr>
@@ -4797,12 +4603,20 @@
           </a:p>
         </p:txBody>
       </p:sp>
-      <p:sp>
-        <p:nvSpPr>
-          <p:cNvPr id="9" name="Shape 7"/>
-          <p:cNvSpPr/>
-          <p:nvPr/>
-        </p:nvSpPr>
+      <p:pic>
+        <p:nvPicPr>
+          <p:cNvPr id="9" name="Image 0" descr="C:\Users\Galih Sidik\travel\presentation\screenshots\07-print-manifest.png">    </p:cNvPr>
+          <p:cNvPicPr>
+            <a:picLocks noChangeAspect="1"/>
+          </p:cNvPicPr>
+          <p:nvPr/>
+        </p:nvPicPr>
+        <p:blipFill>
+          <a:blip r:embed="rId1"/>
+          <a:stretch>
+            <a:fillRect/>
+          </a:stretch>
+        </p:blipFill>
         <p:spPr>
           <a:xfrm>
             <a:off x="822960" y="4114800"/>
@@ -4811,116 +4625,11 @@
           <a:prstGeom prst="rect">
             <a:avLst/>
           </a:prstGeom>
-          <a:solidFill>
-            <a:srgbClr val="11100E"/>
-          </a:solidFill>
-          <a:ln w="12700">
-            <a:solidFill>
-              <a:srgbClr val="3A3630"/>
-            </a:solidFill>
-            <a:prstDash val="dash"/>
-          </a:ln>
-        </p:spPr>
-      </p:sp>
-      <p:sp>
-        <p:nvSpPr>
-          <p:cNvPr id="10" name="Text 8"/>
-          <p:cNvSpPr/>
-          <p:nvPr/>
-        </p:nvSpPr>
-        <p:spPr>
-          <a:xfrm>
-            <a:off x="1005840" y="4434840"/>
-            <a:ext cx="2606040" cy="1097280"/>
-          </a:xfrm>
-          <a:prstGeom prst="rect">
-            <a:avLst/>
-          </a:prstGeom>
-          <a:noFill/>
-          <a:ln/>
-        </p:spPr>
-        <p:txBody>
-          <a:bodyPr wrap="square" rtlCol="0" anchor="ctr"/>
-          <a:lstStyle/>
-          <a:p>
-            <a:pPr algn="ctr" indent="0" marL="0">
-              <a:buNone/>
-            </a:pPr>
-            <a:r>
-              <a:rPr lang="en-US" sz="1100" spc="100" kern="0" dirty="0">
-                <a:solidFill>
-                  <a:srgbClr val="8E8676"/>
-                </a:solidFill>
-                <a:latin typeface="Consolas" pitchFamily="34" charset="0"/>
-                <a:ea typeface="Consolas" pitchFamily="34" charset="-122"/>
-                <a:cs typeface="Consolas" pitchFamily="34" charset="-120"/>
-              </a:rPr>
-              <a:t>📸 SCREENSHOT</a:t>
-            </a:r>
-            <a:endParaRPr lang="en-US" sz="1100" dirty="0"/>
-          </a:p>
-          <a:p>
-            <a:pPr algn="ctr" indent="0" marL="0">
-              <a:buNone/>
-            </a:pPr>
-            <a:r>
-              <a:rPr lang="en-US" sz="1100" spc="100" kern="0" dirty="0">
-                <a:solidFill>
-                  <a:srgbClr val="8E8676"/>
-                </a:solidFill>
-                <a:latin typeface="Consolas" pitchFamily="34" charset="0"/>
-                <a:ea typeface="Consolas" pitchFamily="34" charset="-122"/>
-                <a:cs typeface="Consolas" pitchFamily="34" charset="-120"/>
-              </a:rPr>
-              <a:t>07-print-manifest.png</a:t>
-            </a:r>
-            <a:endParaRPr lang="en-US" sz="1100" dirty="0"/>
-          </a:p>
-          <a:p>
-            <a:pPr algn="ctr" indent="0" marL="0">
-              <a:buNone/>
-            </a:pPr>
-            <a:endParaRPr lang="en-US" sz="1100" dirty="0"/>
-          </a:p>
-          <a:p>
-            <a:pPr algn="ctr" indent="0" marL="0">
-              <a:buNone/>
-            </a:pPr>
-            <a:r>
-              <a:rPr lang="en-US" sz="1100" spc="100" kern="0" dirty="0">
-                <a:solidFill>
-                  <a:srgbClr val="8E8676"/>
-                </a:solidFill>
-                <a:latin typeface="Consolas" pitchFamily="34" charset="0"/>
-                <a:ea typeface="Consolas" pitchFamily="34" charset="-122"/>
-                <a:cs typeface="Consolas" pitchFamily="34" charset="-120"/>
-              </a:rPr>
-              <a:t>Drop file into</a:t>
-            </a:r>
-            <a:endParaRPr lang="en-US" sz="1100" dirty="0"/>
-          </a:p>
-          <a:p>
-            <a:pPr algn="ctr" indent="0" marL="0">
-              <a:buNone/>
-            </a:pPr>
-            <a:r>
-              <a:rPr lang="en-US" sz="1100" spc="100" kern="0" dirty="0">
-                <a:solidFill>
-                  <a:srgbClr val="8E8676"/>
-                </a:solidFill>
-                <a:latin typeface="Consolas" pitchFamily="34" charset="0"/>
-                <a:ea typeface="Consolas" pitchFamily="34" charset="-122"/>
-                <a:cs typeface="Consolas" pitchFamily="34" charset="-120"/>
-              </a:rPr>
-              <a:t>presentation/screenshots/</a:t>
-            </a:r>
-            <a:endParaRPr lang="en-US" sz="1100" dirty="0"/>
-          </a:p>
-        </p:txBody>
-      </p:sp>
-      <p:sp>
-        <p:nvSpPr>
-          <p:cNvPr id="11" name="Shape 9"/>
+        </p:spPr>
+      </p:pic>
+      <p:sp>
+        <p:nvSpPr>
+          <p:cNvPr id="10" name="Shape 7"/>
           <p:cNvSpPr/>
           <p:nvPr/>
         </p:nvSpPr>
@@ -4945,7 +4654,7 @@
       </p:sp>
       <p:sp>
         <p:nvSpPr>
-          <p:cNvPr id="12" name="Text 10"/>
+          <p:cNvPr id="11" name="Text 8"/>
           <p:cNvSpPr/>
           <p:nvPr/>
         </p:nvSpPr>
@@ -4984,7 +4693,7 @@
       </p:sp>
       <p:sp>
         <p:nvSpPr>
-          <p:cNvPr id="13" name="Text 11"/>
+          <p:cNvPr id="12" name="Text 9"/>
           <p:cNvSpPr/>
           <p:nvPr/>
         </p:nvSpPr>
@@ -5084,12 +4793,20 @@
           </a:p>
         </p:txBody>
       </p:sp>
-      <p:sp>
-        <p:nvSpPr>
-          <p:cNvPr id="14" name="Shape 12"/>
-          <p:cNvSpPr/>
-          <p:nvPr/>
-        </p:nvSpPr>
+      <p:pic>
+        <p:nvPicPr>
+          <p:cNvPr id="13" name="Image 1" descr="C:\Users\Galih Sidik\travel\presentation\screenshots\08-print-voucher.png">    </p:cNvPr>
+          <p:cNvPicPr>
+            <a:picLocks noChangeAspect="1"/>
+          </p:cNvPicPr>
+          <p:nvPr/>
+        </p:nvPicPr>
+        <p:blipFill>
+          <a:blip r:embed="rId2"/>
+          <a:stretch>
+            <a:fillRect/>
+          </a:stretch>
+        </p:blipFill>
         <p:spPr>
           <a:xfrm>
             <a:off x="4709160" y="4114800"/>
@@ -5098,116 +4815,11 @@
           <a:prstGeom prst="rect">
             <a:avLst/>
           </a:prstGeom>
-          <a:solidFill>
-            <a:srgbClr val="11100E"/>
-          </a:solidFill>
-          <a:ln w="12700">
-            <a:solidFill>
-              <a:srgbClr val="3A3630"/>
-            </a:solidFill>
-            <a:prstDash val="dash"/>
-          </a:ln>
-        </p:spPr>
-      </p:sp>
-      <p:sp>
-        <p:nvSpPr>
-          <p:cNvPr id="15" name="Text 13"/>
-          <p:cNvSpPr/>
-          <p:nvPr/>
-        </p:nvSpPr>
-        <p:spPr>
-          <a:xfrm>
-            <a:off x="4892040" y="4434840"/>
-            <a:ext cx="2606040" cy="1097280"/>
-          </a:xfrm>
-          <a:prstGeom prst="rect">
-            <a:avLst/>
-          </a:prstGeom>
-          <a:noFill/>
-          <a:ln/>
-        </p:spPr>
-        <p:txBody>
-          <a:bodyPr wrap="square" rtlCol="0" anchor="ctr"/>
-          <a:lstStyle/>
-          <a:p>
-            <a:pPr algn="ctr" indent="0" marL="0">
-              <a:buNone/>
-            </a:pPr>
-            <a:r>
-              <a:rPr lang="en-US" sz="1100" spc="100" kern="0" dirty="0">
-                <a:solidFill>
-                  <a:srgbClr val="8E8676"/>
-                </a:solidFill>
-                <a:latin typeface="Consolas" pitchFamily="34" charset="0"/>
-                <a:ea typeface="Consolas" pitchFamily="34" charset="-122"/>
-                <a:cs typeface="Consolas" pitchFamily="34" charset="-120"/>
-              </a:rPr>
-              <a:t>📸 SCREENSHOT</a:t>
-            </a:r>
-            <a:endParaRPr lang="en-US" sz="1100" dirty="0"/>
-          </a:p>
-          <a:p>
-            <a:pPr algn="ctr" indent="0" marL="0">
-              <a:buNone/>
-            </a:pPr>
-            <a:r>
-              <a:rPr lang="en-US" sz="1100" spc="100" kern="0" dirty="0">
-                <a:solidFill>
-                  <a:srgbClr val="8E8676"/>
-                </a:solidFill>
-                <a:latin typeface="Consolas" pitchFamily="34" charset="0"/>
-                <a:ea typeface="Consolas" pitchFamily="34" charset="-122"/>
-                <a:cs typeface="Consolas" pitchFamily="34" charset="-120"/>
-              </a:rPr>
-              <a:t>08-print-voucher.png</a:t>
-            </a:r>
-            <a:endParaRPr lang="en-US" sz="1100" dirty="0"/>
-          </a:p>
-          <a:p>
-            <a:pPr algn="ctr" indent="0" marL="0">
-              <a:buNone/>
-            </a:pPr>
-            <a:endParaRPr lang="en-US" sz="1100" dirty="0"/>
-          </a:p>
-          <a:p>
-            <a:pPr algn="ctr" indent="0" marL="0">
-              <a:buNone/>
-            </a:pPr>
-            <a:r>
-              <a:rPr lang="en-US" sz="1100" spc="100" kern="0" dirty="0">
-                <a:solidFill>
-                  <a:srgbClr val="8E8676"/>
-                </a:solidFill>
-                <a:latin typeface="Consolas" pitchFamily="34" charset="0"/>
-                <a:ea typeface="Consolas" pitchFamily="34" charset="-122"/>
-                <a:cs typeface="Consolas" pitchFamily="34" charset="-120"/>
-              </a:rPr>
-              <a:t>Drop file into</a:t>
-            </a:r>
-            <a:endParaRPr lang="en-US" sz="1100" dirty="0"/>
-          </a:p>
-          <a:p>
-            <a:pPr algn="ctr" indent="0" marL="0">
-              <a:buNone/>
-            </a:pPr>
-            <a:r>
-              <a:rPr lang="en-US" sz="1100" spc="100" kern="0" dirty="0">
-                <a:solidFill>
-                  <a:srgbClr val="8E8676"/>
-                </a:solidFill>
-                <a:latin typeface="Consolas" pitchFamily="34" charset="0"/>
-                <a:ea typeface="Consolas" pitchFamily="34" charset="-122"/>
-                <a:cs typeface="Consolas" pitchFamily="34" charset="-120"/>
-              </a:rPr>
-              <a:t>presentation/screenshots/</a:t>
-            </a:r>
-            <a:endParaRPr lang="en-US" sz="1100" dirty="0"/>
-          </a:p>
-        </p:txBody>
-      </p:sp>
-      <p:sp>
-        <p:nvSpPr>
-          <p:cNvPr id="16" name="Shape 14"/>
+        </p:spPr>
+      </p:pic>
+      <p:sp>
+        <p:nvSpPr>
+          <p:cNvPr id="14" name="Shape 10"/>
           <p:cNvSpPr/>
           <p:nvPr/>
         </p:nvSpPr>
@@ -5232,7 +4844,7 @@
       </p:sp>
       <p:sp>
         <p:nvSpPr>
-          <p:cNvPr id="17" name="Text 15"/>
+          <p:cNvPr id="15" name="Text 11"/>
           <p:cNvSpPr/>
           <p:nvPr/>
         </p:nvSpPr>
@@ -5271,7 +4883,7 @@
       </p:sp>
       <p:sp>
         <p:nvSpPr>
-          <p:cNvPr id="18" name="Text 16"/>
+          <p:cNvPr id="16" name="Text 12"/>
           <p:cNvSpPr/>
           <p:nvPr/>
         </p:nvSpPr>
@@ -5371,12 +4983,20 @@
           </a:p>
         </p:txBody>
       </p:sp>
-      <p:sp>
-        <p:nvSpPr>
-          <p:cNvPr id="19" name="Shape 17"/>
-          <p:cNvSpPr/>
-          <p:nvPr/>
-        </p:nvSpPr>
+      <p:pic>
+        <p:nvPicPr>
+          <p:cNvPr id="17" name="Image 2" descr="C:\Users\Galih Sidik\travel\presentation\screenshots\09-print-slip.png">    </p:cNvPr>
+          <p:cNvPicPr>
+            <a:picLocks noChangeAspect="1"/>
+          </p:cNvPicPr>
+          <p:nvPr/>
+        </p:nvPicPr>
+        <p:blipFill>
+          <a:blip r:embed="rId3"/>
+          <a:stretch>
+            <a:fillRect/>
+          </a:stretch>
+        </p:blipFill>
         <p:spPr>
           <a:xfrm>
             <a:off x="8595360" y="4114800"/>
@@ -5385,116 +5005,11 @@
           <a:prstGeom prst="rect">
             <a:avLst/>
           </a:prstGeom>
-          <a:solidFill>
-            <a:srgbClr val="11100E"/>
-          </a:solidFill>
-          <a:ln w="12700">
-            <a:solidFill>
-              <a:srgbClr val="3A3630"/>
-            </a:solidFill>
-            <a:prstDash val="dash"/>
-          </a:ln>
-        </p:spPr>
-      </p:sp>
-      <p:sp>
-        <p:nvSpPr>
-          <p:cNvPr id="20" name="Text 18"/>
-          <p:cNvSpPr/>
-          <p:nvPr/>
-        </p:nvSpPr>
-        <p:spPr>
-          <a:xfrm>
-            <a:off x="8778240" y="4434840"/>
-            <a:ext cx="2606040" cy="1097280"/>
-          </a:xfrm>
-          <a:prstGeom prst="rect">
-            <a:avLst/>
-          </a:prstGeom>
-          <a:noFill/>
-          <a:ln/>
-        </p:spPr>
-        <p:txBody>
-          <a:bodyPr wrap="square" rtlCol="0" anchor="ctr"/>
-          <a:lstStyle/>
-          <a:p>
-            <a:pPr algn="ctr" indent="0" marL="0">
-              <a:buNone/>
-            </a:pPr>
-            <a:r>
-              <a:rPr lang="en-US" sz="1100" spc="100" kern="0" dirty="0">
-                <a:solidFill>
-                  <a:srgbClr val="8E8676"/>
-                </a:solidFill>
-                <a:latin typeface="Consolas" pitchFamily="34" charset="0"/>
-                <a:ea typeface="Consolas" pitchFamily="34" charset="-122"/>
-                <a:cs typeface="Consolas" pitchFamily="34" charset="-120"/>
-              </a:rPr>
-              <a:t>📸 SCREENSHOT</a:t>
-            </a:r>
-            <a:endParaRPr lang="en-US" sz="1100" dirty="0"/>
-          </a:p>
-          <a:p>
-            <a:pPr algn="ctr" indent="0" marL="0">
-              <a:buNone/>
-            </a:pPr>
-            <a:r>
-              <a:rPr lang="en-US" sz="1100" spc="100" kern="0" dirty="0">
-                <a:solidFill>
-                  <a:srgbClr val="8E8676"/>
-                </a:solidFill>
-                <a:latin typeface="Consolas" pitchFamily="34" charset="0"/>
-                <a:ea typeface="Consolas" pitchFamily="34" charset="-122"/>
-                <a:cs typeface="Consolas" pitchFamily="34" charset="-120"/>
-              </a:rPr>
-              <a:t>09-print-slip.png</a:t>
-            </a:r>
-            <a:endParaRPr lang="en-US" sz="1100" dirty="0"/>
-          </a:p>
-          <a:p>
-            <a:pPr algn="ctr" indent="0" marL="0">
-              <a:buNone/>
-            </a:pPr>
-            <a:endParaRPr lang="en-US" sz="1100" dirty="0"/>
-          </a:p>
-          <a:p>
-            <a:pPr algn="ctr" indent="0" marL="0">
-              <a:buNone/>
-            </a:pPr>
-            <a:r>
-              <a:rPr lang="en-US" sz="1100" spc="100" kern="0" dirty="0">
-                <a:solidFill>
-                  <a:srgbClr val="8E8676"/>
-                </a:solidFill>
-                <a:latin typeface="Consolas" pitchFamily="34" charset="0"/>
-                <a:ea typeface="Consolas" pitchFamily="34" charset="-122"/>
-                <a:cs typeface="Consolas" pitchFamily="34" charset="-120"/>
-              </a:rPr>
-              <a:t>Drop file into</a:t>
-            </a:r>
-            <a:endParaRPr lang="en-US" sz="1100" dirty="0"/>
-          </a:p>
-          <a:p>
-            <a:pPr algn="ctr" indent="0" marL="0">
-              <a:buNone/>
-            </a:pPr>
-            <a:r>
-              <a:rPr lang="en-US" sz="1100" spc="100" kern="0" dirty="0">
-                <a:solidFill>
-                  <a:srgbClr val="8E8676"/>
-                </a:solidFill>
-                <a:latin typeface="Consolas" pitchFamily="34" charset="0"/>
-                <a:ea typeface="Consolas" pitchFamily="34" charset="-122"/>
-                <a:cs typeface="Consolas" pitchFamily="34" charset="-120"/>
-              </a:rPr>
-              <a:t>presentation/screenshots/</a:t>
-            </a:r>
-            <a:endParaRPr lang="en-US" sz="1100" dirty="0"/>
-          </a:p>
-        </p:txBody>
-      </p:sp>
-      <p:sp>
-        <p:nvSpPr>
-          <p:cNvPr id="21" name="Text 19"/>
+        </p:spPr>
+      </p:pic>
+      <p:sp>
+        <p:nvSpPr>
+          <p:cNvPr id="18" name="Text 13"/>
           <p:cNvSpPr/>
           <p:nvPr/>
         </p:nvSpPr>
@@ -5533,7 +5048,7 @@
       </p:sp>
       <p:sp>
         <p:nvSpPr>
-          <p:cNvPr id="22" name="Text 20"/>
+          <p:cNvPr id="19" name="Text 14"/>
           <p:cNvSpPr/>
           <p:nvPr/>
         </p:nvSpPr>
@@ -5896,12 +5411,20 @@
           </a:p>
         </p:txBody>
       </p:sp>
-      <p:sp>
-        <p:nvSpPr>
-          <p:cNvPr id="7" name="Shape 5"/>
-          <p:cNvSpPr/>
-          <p:nvPr/>
-        </p:nvSpPr>
+      <p:pic>
+        <p:nvPicPr>
+          <p:cNvPr id="7" name="Image 0" descr="C:\Users\Galih Sidik\travel\presentation\screenshots\10-leaderboard.png">    </p:cNvPr>
+          <p:cNvPicPr>
+            <a:picLocks noChangeAspect="1"/>
+          </p:cNvPicPr>
+          <p:nvPr/>
+        </p:nvPicPr>
+        <p:blipFill>
+          <a:blip r:embed="rId1"/>
+          <a:stretch>
+            <a:fillRect/>
+          </a:stretch>
+        </p:blipFill>
         <p:spPr>
           <a:xfrm>
             <a:off x="6675120" y="2194560"/>
@@ -5910,116 +5433,11 @@
           <a:prstGeom prst="rect">
             <a:avLst/>
           </a:prstGeom>
-          <a:solidFill>
-            <a:srgbClr val="11100E"/>
-          </a:solidFill>
-          <a:ln w="12700">
-            <a:solidFill>
-              <a:srgbClr val="3A3630"/>
-            </a:solidFill>
-            <a:prstDash val="dash"/>
-          </a:ln>
-        </p:spPr>
-      </p:sp>
-      <p:sp>
-        <p:nvSpPr>
-          <p:cNvPr id="8" name="Text 6"/>
-          <p:cNvSpPr/>
-          <p:nvPr/>
-        </p:nvSpPr>
-        <p:spPr>
-          <a:xfrm>
-            <a:off x="6858000" y="3383280"/>
-            <a:ext cx="4572000" cy="1097280"/>
-          </a:xfrm>
-          <a:prstGeom prst="rect">
-            <a:avLst/>
-          </a:prstGeom>
-          <a:noFill/>
-          <a:ln/>
-        </p:spPr>
-        <p:txBody>
-          <a:bodyPr wrap="square" rtlCol="0" anchor="ctr"/>
-          <a:lstStyle/>
-          <a:p>
-            <a:pPr algn="ctr" indent="0" marL="0">
-              <a:buNone/>
-            </a:pPr>
-            <a:r>
-              <a:rPr lang="en-US" sz="1100" spc="100" kern="0" dirty="0">
-                <a:solidFill>
-                  <a:srgbClr val="8E8676"/>
-                </a:solidFill>
-                <a:latin typeface="Consolas" pitchFamily="34" charset="0"/>
-                <a:ea typeface="Consolas" pitchFamily="34" charset="-122"/>
-                <a:cs typeface="Consolas" pitchFamily="34" charset="-120"/>
-              </a:rPr>
-              <a:t>📸 SCREENSHOT</a:t>
-            </a:r>
-            <a:endParaRPr lang="en-US" sz="1100" dirty="0"/>
-          </a:p>
-          <a:p>
-            <a:pPr algn="ctr" indent="0" marL="0">
-              <a:buNone/>
-            </a:pPr>
-            <a:r>
-              <a:rPr lang="en-US" sz="1100" spc="100" kern="0" dirty="0">
-                <a:solidFill>
-                  <a:srgbClr val="8E8676"/>
-                </a:solidFill>
-                <a:latin typeface="Consolas" pitchFamily="34" charset="0"/>
-                <a:ea typeface="Consolas" pitchFamily="34" charset="-122"/>
-                <a:cs typeface="Consolas" pitchFamily="34" charset="-120"/>
-              </a:rPr>
-              <a:t>10-leaderboard.png</a:t>
-            </a:r>
-            <a:endParaRPr lang="en-US" sz="1100" dirty="0"/>
-          </a:p>
-          <a:p>
-            <a:pPr algn="ctr" indent="0" marL="0">
-              <a:buNone/>
-            </a:pPr>
-            <a:endParaRPr lang="en-US" sz="1100" dirty="0"/>
-          </a:p>
-          <a:p>
-            <a:pPr algn="ctr" indent="0" marL="0">
-              <a:buNone/>
-            </a:pPr>
-            <a:r>
-              <a:rPr lang="en-US" sz="1100" spc="100" kern="0" dirty="0">
-                <a:solidFill>
-                  <a:srgbClr val="8E8676"/>
-                </a:solidFill>
-                <a:latin typeface="Consolas" pitchFamily="34" charset="0"/>
-                <a:ea typeface="Consolas" pitchFamily="34" charset="-122"/>
-                <a:cs typeface="Consolas" pitchFamily="34" charset="-120"/>
-              </a:rPr>
-              <a:t>Drop file into</a:t>
-            </a:r>
-            <a:endParaRPr lang="en-US" sz="1100" dirty="0"/>
-          </a:p>
-          <a:p>
-            <a:pPr algn="ctr" indent="0" marL="0">
-              <a:buNone/>
-            </a:pPr>
-            <a:r>
-              <a:rPr lang="en-US" sz="1100" spc="100" kern="0" dirty="0">
-                <a:solidFill>
-                  <a:srgbClr val="8E8676"/>
-                </a:solidFill>
-                <a:latin typeface="Consolas" pitchFamily="34" charset="0"/>
-                <a:ea typeface="Consolas" pitchFamily="34" charset="-122"/>
-                <a:cs typeface="Consolas" pitchFamily="34" charset="-120"/>
-              </a:rPr>
-              <a:t>presentation/screenshots/</a:t>
-            </a:r>
-            <a:endParaRPr lang="en-US" sz="1100" dirty="0"/>
-          </a:p>
-        </p:txBody>
-      </p:sp>
-      <p:sp>
-        <p:nvSpPr>
-          <p:cNvPr id="9" name="Text 7"/>
+        </p:spPr>
+      </p:pic>
+      <p:sp>
+        <p:nvSpPr>
+          <p:cNvPr id="8" name="Text 5"/>
           <p:cNvSpPr/>
           <p:nvPr/>
         </p:nvSpPr>
@@ -6058,7 +5476,7 @@
       </p:sp>
       <p:sp>
         <p:nvSpPr>
-          <p:cNvPr id="10" name="Text 8"/>
+          <p:cNvPr id="9" name="Text 6"/>
           <p:cNvSpPr/>
           <p:nvPr/>
         </p:nvSpPr>
@@ -6097,7 +5515,7 @@
       </p:sp>
       <p:sp>
         <p:nvSpPr>
-          <p:cNvPr id="11" name="Text 9"/>
+          <p:cNvPr id="10" name="Text 7"/>
           <p:cNvSpPr/>
           <p:nvPr/>
         </p:nvSpPr>
@@ -13815,12 +13233,20 @@
           </a:p>
         </p:txBody>
       </p:sp>
-      <p:sp>
-        <p:nvSpPr>
-          <p:cNvPr id="7" name="Shape 5"/>
-          <p:cNvSpPr/>
-          <p:nvPr/>
-        </p:nvSpPr>
+      <p:pic>
+        <p:nvPicPr>
+          <p:cNvPr id="7" name="Image 0" descr="C:\Users\Galih Sidik\travel\presentation\screenshots\01-public-landing.png">    </p:cNvPr>
+          <p:cNvPicPr>
+            <a:picLocks noChangeAspect="1"/>
+          </p:cNvPicPr>
+          <p:nvPr/>
+        </p:nvPicPr>
+        <p:blipFill>
+          <a:blip r:embed="rId1"/>
+          <a:stretch>
+            <a:fillRect/>
+          </a:stretch>
+        </p:blipFill>
         <p:spPr>
           <a:xfrm>
             <a:off x="6675120" y="2194560"/>
@@ -13829,116 +13255,11 @@
           <a:prstGeom prst="rect">
             <a:avLst/>
           </a:prstGeom>
-          <a:solidFill>
-            <a:srgbClr val="11100E"/>
-          </a:solidFill>
-          <a:ln w="12700">
-            <a:solidFill>
-              <a:srgbClr val="3A3630"/>
-            </a:solidFill>
-            <a:prstDash val="dash"/>
-          </a:ln>
-        </p:spPr>
-      </p:sp>
-      <p:sp>
-        <p:nvSpPr>
-          <p:cNvPr id="8" name="Text 6"/>
-          <p:cNvSpPr/>
-          <p:nvPr/>
-        </p:nvSpPr>
-        <p:spPr>
-          <a:xfrm>
-            <a:off x="6858000" y="3383280"/>
-            <a:ext cx="4572000" cy="1097280"/>
-          </a:xfrm>
-          <a:prstGeom prst="rect">
-            <a:avLst/>
-          </a:prstGeom>
-          <a:noFill/>
-          <a:ln/>
-        </p:spPr>
-        <p:txBody>
-          <a:bodyPr wrap="square" rtlCol="0" anchor="ctr"/>
-          <a:lstStyle/>
-          <a:p>
-            <a:pPr algn="ctr" indent="0" marL="0">
-              <a:buNone/>
-            </a:pPr>
-            <a:r>
-              <a:rPr lang="en-US" sz="1100" spc="100" kern="0" dirty="0">
-                <a:solidFill>
-                  <a:srgbClr val="8E8676"/>
-                </a:solidFill>
-                <a:latin typeface="Consolas" pitchFamily="34" charset="0"/>
-                <a:ea typeface="Consolas" pitchFamily="34" charset="-122"/>
-                <a:cs typeface="Consolas" pitchFamily="34" charset="-120"/>
-              </a:rPr>
-              <a:t>📸 SCREENSHOT</a:t>
-            </a:r>
-            <a:endParaRPr lang="en-US" sz="1100" dirty="0"/>
-          </a:p>
-          <a:p>
-            <a:pPr algn="ctr" indent="0" marL="0">
-              <a:buNone/>
-            </a:pPr>
-            <a:r>
-              <a:rPr lang="en-US" sz="1100" spc="100" kern="0" dirty="0">
-                <a:solidFill>
-                  <a:srgbClr val="8E8676"/>
-                </a:solidFill>
-                <a:latin typeface="Consolas" pitchFamily="34" charset="0"/>
-                <a:ea typeface="Consolas" pitchFamily="34" charset="-122"/>
-                <a:cs typeface="Consolas" pitchFamily="34" charset="-120"/>
-              </a:rPr>
-              <a:t>01-public-landing.png</a:t>
-            </a:r>
-            <a:endParaRPr lang="en-US" sz="1100" dirty="0"/>
-          </a:p>
-          <a:p>
-            <a:pPr algn="ctr" indent="0" marL="0">
-              <a:buNone/>
-            </a:pPr>
-            <a:endParaRPr lang="en-US" sz="1100" dirty="0"/>
-          </a:p>
-          <a:p>
-            <a:pPr algn="ctr" indent="0" marL="0">
-              <a:buNone/>
-            </a:pPr>
-            <a:r>
-              <a:rPr lang="en-US" sz="1100" spc="100" kern="0" dirty="0">
-                <a:solidFill>
-                  <a:srgbClr val="8E8676"/>
-                </a:solidFill>
-                <a:latin typeface="Consolas" pitchFamily="34" charset="0"/>
-                <a:ea typeface="Consolas" pitchFamily="34" charset="-122"/>
-                <a:cs typeface="Consolas" pitchFamily="34" charset="-120"/>
-              </a:rPr>
-              <a:t>Drop file into</a:t>
-            </a:r>
-            <a:endParaRPr lang="en-US" sz="1100" dirty="0"/>
-          </a:p>
-          <a:p>
-            <a:pPr algn="ctr" indent="0" marL="0">
-              <a:buNone/>
-            </a:pPr>
-            <a:r>
-              <a:rPr lang="en-US" sz="1100" spc="100" kern="0" dirty="0">
-                <a:solidFill>
-                  <a:srgbClr val="8E8676"/>
-                </a:solidFill>
-                <a:latin typeface="Consolas" pitchFamily="34" charset="0"/>
-                <a:ea typeface="Consolas" pitchFamily="34" charset="-122"/>
-                <a:cs typeface="Consolas" pitchFamily="34" charset="-120"/>
-              </a:rPr>
-              <a:t>presentation/screenshots/</a:t>
-            </a:r>
-            <a:endParaRPr lang="en-US" sz="1100" dirty="0"/>
-          </a:p>
-        </p:txBody>
-      </p:sp>
-      <p:sp>
-        <p:nvSpPr>
-          <p:cNvPr id="9" name="Text 7"/>
+        </p:spPr>
+      </p:pic>
+      <p:sp>
+        <p:nvSpPr>
+          <p:cNvPr id="8" name="Text 5"/>
           <p:cNvSpPr/>
           <p:nvPr/>
         </p:nvSpPr>
@@ -13977,7 +13298,7 @@
       </p:sp>
       <p:sp>
         <p:nvSpPr>
-          <p:cNvPr id="10" name="Text 8"/>
+          <p:cNvPr id="9" name="Text 6"/>
           <p:cNvSpPr/>
           <p:nvPr/>
         </p:nvSpPr>
@@ -14016,7 +13337,7 @@
       </p:sp>
       <p:sp>
         <p:nvSpPr>
-          <p:cNvPr id="11" name="Text 9"/>
+          <p:cNvPr id="10" name="Text 7"/>
           <p:cNvSpPr/>
           <p:nvPr/>
         </p:nvSpPr>
@@ -14401,12 +13722,20 @@
           </a:p>
         </p:txBody>
       </p:sp>
-      <p:sp>
-        <p:nvSpPr>
-          <p:cNvPr id="7" name="Shape 5"/>
-          <p:cNvSpPr/>
-          <p:nvPr/>
-        </p:nvSpPr>
+      <p:pic>
+        <p:nvPicPr>
+          <p:cNvPr id="7" name="Image 0" descr="C:\Users\Galih Sidik\travel\presentation\screenshots\02-jemaah-portal.png">    </p:cNvPr>
+          <p:cNvPicPr>
+            <a:picLocks noChangeAspect="1"/>
+          </p:cNvPicPr>
+          <p:nvPr/>
+        </p:nvPicPr>
+        <p:blipFill>
+          <a:blip r:embed="rId1"/>
+          <a:stretch>
+            <a:fillRect/>
+          </a:stretch>
+        </p:blipFill>
         <p:spPr>
           <a:xfrm>
             <a:off x="6675120" y="2194560"/>
@@ -14415,116 +13744,11 @@
           <a:prstGeom prst="rect">
             <a:avLst/>
           </a:prstGeom>
-          <a:solidFill>
-            <a:srgbClr val="11100E"/>
-          </a:solidFill>
-          <a:ln w="12700">
-            <a:solidFill>
-              <a:srgbClr val="3A3630"/>
-            </a:solidFill>
-            <a:prstDash val="dash"/>
-          </a:ln>
-        </p:spPr>
-      </p:sp>
-      <p:sp>
-        <p:nvSpPr>
-          <p:cNvPr id="8" name="Text 6"/>
-          <p:cNvSpPr/>
-          <p:nvPr/>
-        </p:nvSpPr>
-        <p:spPr>
-          <a:xfrm>
-            <a:off x="6858000" y="3383280"/>
-            <a:ext cx="4572000" cy="1097280"/>
-          </a:xfrm>
-          <a:prstGeom prst="rect">
-            <a:avLst/>
-          </a:prstGeom>
-          <a:noFill/>
-          <a:ln/>
-        </p:spPr>
-        <p:txBody>
-          <a:bodyPr wrap="square" rtlCol="0" anchor="ctr"/>
-          <a:lstStyle/>
-          <a:p>
-            <a:pPr algn="ctr" indent="0" marL="0">
-              <a:buNone/>
-            </a:pPr>
-            <a:r>
-              <a:rPr lang="en-US" sz="1100" spc="100" kern="0" dirty="0">
-                <a:solidFill>
-                  <a:srgbClr val="8E8676"/>
-                </a:solidFill>
-                <a:latin typeface="Consolas" pitchFamily="34" charset="0"/>
-                <a:ea typeface="Consolas" pitchFamily="34" charset="-122"/>
-                <a:cs typeface="Consolas" pitchFamily="34" charset="-120"/>
-              </a:rPr>
-              <a:t>📸 SCREENSHOT</a:t>
-            </a:r>
-            <a:endParaRPr lang="en-US" sz="1100" dirty="0"/>
-          </a:p>
-          <a:p>
-            <a:pPr algn="ctr" indent="0" marL="0">
-              <a:buNone/>
-            </a:pPr>
-            <a:r>
-              <a:rPr lang="en-US" sz="1100" spc="100" kern="0" dirty="0">
-                <a:solidFill>
-                  <a:srgbClr val="8E8676"/>
-                </a:solidFill>
-                <a:latin typeface="Consolas" pitchFamily="34" charset="0"/>
-                <a:ea typeface="Consolas" pitchFamily="34" charset="-122"/>
-                <a:cs typeface="Consolas" pitchFamily="34" charset="-120"/>
-              </a:rPr>
-              <a:t>02-jemaah-portal.png</a:t>
-            </a:r>
-            <a:endParaRPr lang="en-US" sz="1100" dirty="0"/>
-          </a:p>
-          <a:p>
-            <a:pPr algn="ctr" indent="0" marL="0">
-              <a:buNone/>
-            </a:pPr>
-            <a:endParaRPr lang="en-US" sz="1100" dirty="0"/>
-          </a:p>
-          <a:p>
-            <a:pPr algn="ctr" indent="0" marL="0">
-              <a:buNone/>
-            </a:pPr>
-            <a:r>
-              <a:rPr lang="en-US" sz="1100" spc="100" kern="0" dirty="0">
-                <a:solidFill>
-                  <a:srgbClr val="8E8676"/>
-                </a:solidFill>
-                <a:latin typeface="Consolas" pitchFamily="34" charset="0"/>
-                <a:ea typeface="Consolas" pitchFamily="34" charset="-122"/>
-                <a:cs typeface="Consolas" pitchFamily="34" charset="-120"/>
-              </a:rPr>
-              <a:t>Drop file into</a:t>
-            </a:r>
-            <a:endParaRPr lang="en-US" sz="1100" dirty="0"/>
-          </a:p>
-          <a:p>
-            <a:pPr algn="ctr" indent="0" marL="0">
-              <a:buNone/>
-            </a:pPr>
-            <a:r>
-              <a:rPr lang="en-US" sz="1100" spc="100" kern="0" dirty="0">
-                <a:solidFill>
-                  <a:srgbClr val="8E8676"/>
-                </a:solidFill>
-                <a:latin typeface="Consolas" pitchFamily="34" charset="0"/>
-                <a:ea typeface="Consolas" pitchFamily="34" charset="-122"/>
-                <a:cs typeface="Consolas" pitchFamily="34" charset="-120"/>
-              </a:rPr>
-              <a:t>presentation/screenshots/</a:t>
-            </a:r>
-            <a:endParaRPr lang="en-US" sz="1100" dirty="0"/>
-          </a:p>
-        </p:txBody>
-      </p:sp>
-      <p:sp>
-        <p:nvSpPr>
-          <p:cNvPr id="9" name="Text 7"/>
+        </p:spPr>
+      </p:pic>
+      <p:sp>
+        <p:nvSpPr>
+          <p:cNvPr id="8" name="Text 5"/>
           <p:cNvSpPr/>
           <p:nvPr/>
         </p:nvSpPr>
@@ -14563,7 +13787,7 @@
       </p:sp>
       <p:sp>
         <p:nvSpPr>
-          <p:cNvPr id="10" name="Text 8"/>
+          <p:cNvPr id="9" name="Text 6"/>
           <p:cNvSpPr/>
           <p:nvPr/>
         </p:nvSpPr>
@@ -14602,7 +13826,7 @@
       </p:sp>
       <p:sp>
         <p:nvSpPr>
-          <p:cNvPr id="11" name="Text 9"/>
+          <p:cNvPr id="10" name="Text 7"/>
           <p:cNvSpPr/>
           <p:nvPr/>
         </p:nvSpPr>
@@ -14943,12 +14167,20 @@
           </a:p>
         </p:txBody>
       </p:sp>
-      <p:sp>
-        <p:nvSpPr>
-          <p:cNvPr id="7" name="Shape 5"/>
-          <p:cNvSpPr/>
-          <p:nvPr/>
-        </p:nvSpPr>
+      <p:pic>
+        <p:nvPicPr>
+          <p:cNvPr id="7" name="Image 0" descr="C:\Users\Galih Sidik\travel\presentation\screenshots\03-agen-crm.png">    </p:cNvPr>
+          <p:cNvPicPr>
+            <a:picLocks noChangeAspect="1"/>
+          </p:cNvPicPr>
+          <p:nvPr/>
+        </p:nvPicPr>
+        <p:blipFill>
+          <a:blip r:embed="rId1"/>
+          <a:stretch>
+            <a:fillRect/>
+          </a:stretch>
+        </p:blipFill>
         <p:spPr>
           <a:xfrm>
             <a:off x="6675120" y="2194560"/>
@@ -14957,116 +14189,11 @@
           <a:prstGeom prst="rect">
             <a:avLst/>
           </a:prstGeom>
-          <a:solidFill>
-            <a:srgbClr val="11100E"/>
-          </a:solidFill>
-          <a:ln w="12700">
-            <a:solidFill>
-              <a:srgbClr val="3A3630"/>
-            </a:solidFill>
-            <a:prstDash val="dash"/>
-          </a:ln>
-        </p:spPr>
-      </p:sp>
-      <p:sp>
-        <p:nvSpPr>
-          <p:cNvPr id="8" name="Text 6"/>
-          <p:cNvSpPr/>
-          <p:nvPr/>
-        </p:nvSpPr>
-        <p:spPr>
-          <a:xfrm>
-            <a:off x="6858000" y="3383280"/>
-            <a:ext cx="4572000" cy="1097280"/>
-          </a:xfrm>
-          <a:prstGeom prst="rect">
-            <a:avLst/>
-          </a:prstGeom>
-          <a:noFill/>
-          <a:ln/>
-        </p:spPr>
-        <p:txBody>
-          <a:bodyPr wrap="square" rtlCol="0" anchor="ctr"/>
-          <a:lstStyle/>
-          <a:p>
-            <a:pPr algn="ctr" indent="0" marL="0">
-              <a:buNone/>
-            </a:pPr>
-            <a:r>
-              <a:rPr lang="en-US" sz="1100" spc="100" kern="0" dirty="0">
-                <a:solidFill>
-                  <a:srgbClr val="8E8676"/>
-                </a:solidFill>
-                <a:latin typeface="Consolas" pitchFamily="34" charset="0"/>
-                <a:ea typeface="Consolas" pitchFamily="34" charset="-122"/>
-                <a:cs typeface="Consolas" pitchFamily="34" charset="-120"/>
-              </a:rPr>
-              <a:t>📸 SCREENSHOT</a:t>
-            </a:r>
-            <a:endParaRPr lang="en-US" sz="1100" dirty="0"/>
-          </a:p>
-          <a:p>
-            <a:pPr algn="ctr" indent="0" marL="0">
-              <a:buNone/>
-            </a:pPr>
-            <a:r>
-              <a:rPr lang="en-US" sz="1100" spc="100" kern="0" dirty="0">
-                <a:solidFill>
-                  <a:srgbClr val="8E8676"/>
-                </a:solidFill>
-                <a:latin typeface="Consolas" pitchFamily="34" charset="0"/>
-                <a:ea typeface="Consolas" pitchFamily="34" charset="-122"/>
-                <a:cs typeface="Consolas" pitchFamily="34" charset="-120"/>
-              </a:rPr>
-              <a:t>03-agen-crm.png</a:t>
-            </a:r>
-            <a:endParaRPr lang="en-US" sz="1100" dirty="0"/>
-          </a:p>
-          <a:p>
-            <a:pPr algn="ctr" indent="0" marL="0">
-              <a:buNone/>
-            </a:pPr>
-            <a:endParaRPr lang="en-US" sz="1100" dirty="0"/>
-          </a:p>
-          <a:p>
-            <a:pPr algn="ctr" indent="0" marL="0">
-              <a:buNone/>
-            </a:pPr>
-            <a:r>
-              <a:rPr lang="en-US" sz="1100" spc="100" kern="0" dirty="0">
-                <a:solidFill>
-                  <a:srgbClr val="8E8676"/>
-                </a:solidFill>
-                <a:latin typeface="Consolas" pitchFamily="34" charset="0"/>
-                <a:ea typeface="Consolas" pitchFamily="34" charset="-122"/>
-                <a:cs typeface="Consolas" pitchFamily="34" charset="-120"/>
-              </a:rPr>
-              <a:t>Drop file into</a:t>
-            </a:r>
-            <a:endParaRPr lang="en-US" sz="1100" dirty="0"/>
-          </a:p>
-          <a:p>
-            <a:pPr algn="ctr" indent="0" marL="0">
-              <a:buNone/>
-            </a:pPr>
-            <a:r>
-              <a:rPr lang="en-US" sz="1100" spc="100" kern="0" dirty="0">
-                <a:solidFill>
-                  <a:srgbClr val="8E8676"/>
-                </a:solidFill>
-                <a:latin typeface="Consolas" pitchFamily="34" charset="0"/>
-                <a:ea typeface="Consolas" pitchFamily="34" charset="-122"/>
-                <a:cs typeface="Consolas" pitchFamily="34" charset="-120"/>
-              </a:rPr>
-              <a:t>presentation/screenshots/</a:t>
-            </a:r>
-            <a:endParaRPr lang="en-US" sz="1100" dirty="0"/>
-          </a:p>
-        </p:txBody>
-      </p:sp>
-      <p:sp>
-        <p:nvSpPr>
-          <p:cNvPr id="9" name="Text 7"/>
+        </p:spPr>
+      </p:pic>
+      <p:sp>
+        <p:nvSpPr>
+          <p:cNvPr id="8" name="Text 5"/>
           <p:cNvSpPr/>
           <p:nvPr/>
         </p:nvSpPr>
@@ -15105,7 +14232,7 @@
       </p:sp>
       <p:sp>
         <p:nvSpPr>
-          <p:cNvPr id="10" name="Text 8"/>
+          <p:cNvPr id="9" name="Text 6"/>
           <p:cNvSpPr/>
           <p:nvPr/>
         </p:nvSpPr>
@@ -15144,7 +14271,7 @@
       </p:sp>
       <p:sp>
         <p:nvSpPr>
-          <p:cNvPr id="11" name="Text 9"/>
+          <p:cNvPr id="10" name="Text 7"/>
           <p:cNvSpPr/>
           <p:nvPr/>
         </p:nvSpPr>
@@ -15507,12 +14634,20 @@
           </a:p>
         </p:txBody>
       </p:sp>
-      <p:sp>
-        <p:nvSpPr>
-          <p:cNvPr id="7" name="Shape 5"/>
-          <p:cNvSpPr/>
-          <p:nvPr/>
-        </p:nvSpPr>
+      <p:pic>
+        <p:nvPicPr>
+          <p:cNvPr id="7" name="Image 0" descr="C:\Users\Galih Sidik\travel\presentation\screenshots\04-crew-portal.png">    </p:cNvPr>
+          <p:cNvPicPr>
+            <a:picLocks noChangeAspect="1"/>
+          </p:cNvPicPr>
+          <p:nvPr/>
+        </p:nvPicPr>
+        <p:blipFill>
+          <a:blip r:embed="rId1"/>
+          <a:stretch>
+            <a:fillRect/>
+          </a:stretch>
+        </p:blipFill>
         <p:spPr>
           <a:xfrm>
             <a:off x="6675120" y="2194560"/>
@@ -15521,116 +14656,11 @@
           <a:prstGeom prst="rect">
             <a:avLst/>
           </a:prstGeom>
-          <a:solidFill>
-            <a:srgbClr val="11100E"/>
-          </a:solidFill>
-          <a:ln w="12700">
-            <a:solidFill>
-              <a:srgbClr val="3A3630"/>
-            </a:solidFill>
-            <a:prstDash val="dash"/>
-          </a:ln>
-        </p:spPr>
-      </p:sp>
-      <p:sp>
-        <p:nvSpPr>
-          <p:cNvPr id="8" name="Text 6"/>
-          <p:cNvSpPr/>
-          <p:nvPr/>
-        </p:nvSpPr>
-        <p:spPr>
-          <a:xfrm>
-            <a:off x="6858000" y="3383280"/>
-            <a:ext cx="4572000" cy="1097280"/>
-          </a:xfrm>
-          <a:prstGeom prst="rect">
-            <a:avLst/>
-          </a:prstGeom>
-          <a:noFill/>
-          <a:ln/>
-        </p:spPr>
-        <p:txBody>
-          <a:bodyPr wrap="square" rtlCol="0" anchor="ctr"/>
-          <a:lstStyle/>
-          <a:p>
-            <a:pPr algn="ctr" indent="0" marL="0">
-              <a:buNone/>
-            </a:pPr>
-            <a:r>
-              <a:rPr lang="en-US" sz="1100" spc="100" kern="0" dirty="0">
-                <a:solidFill>
-                  <a:srgbClr val="8E8676"/>
-                </a:solidFill>
-                <a:latin typeface="Consolas" pitchFamily="34" charset="0"/>
-                <a:ea typeface="Consolas" pitchFamily="34" charset="-122"/>
-                <a:cs typeface="Consolas" pitchFamily="34" charset="-120"/>
-              </a:rPr>
-              <a:t>📸 SCREENSHOT</a:t>
-            </a:r>
-            <a:endParaRPr lang="en-US" sz="1100" dirty="0"/>
-          </a:p>
-          <a:p>
-            <a:pPr algn="ctr" indent="0" marL="0">
-              <a:buNone/>
-            </a:pPr>
-            <a:r>
-              <a:rPr lang="en-US" sz="1100" spc="100" kern="0" dirty="0">
-                <a:solidFill>
-                  <a:srgbClr val="8E8676"/>
-                </a:solidFill>
-                <a:latin typeface="Consolas" pitchFamily="34" charset="0"/>
-                <a:ea typeface="Consolas" pitchFamily="34" charset="-122"/>
-                <a:cs typeface="Consolas" pitchFamily="34" charset="-120"/>
-              </a:rPr>
-              <a:t>04-crew-portal.png</a:t>
-            </a:r>
-            <a:endParaRPr lang="en-US" sz="1100" dirty="0"/>
-          </a:p>
-          <a:p>
-            <a:pPr algn="ctr" indent="0" marL="0">
-              <a:buNone/>
-            </a:pPr>
-            <a:endParaRPr lang="en-US" sz="1100" dirty="0"/>
-          </a:p>
-          <a:p>
-            <a:pPr algn="ctr" indent="0" marL="0">
-              <a:buNone/>
-            </a:pPr>
-            <a:r>
-              <a:rPr lang="en-US" sz="1100" spc="100" kern="0" dirty="0">
-                <a:solidFill>
-                  <a:srgbClr val="8E8676"/>
-                </a:solidFill>
-                <a:latin typeface="Consolas" pitchFamily="34" charset="0"/>
-                <a:ea typeface="Consolas" pitchFamily="34" charset="-122"/>
-                <a:cs typeface="Consolas" pitchFamily="34" charset="-120"/>
-              </a:rPr>
-              <a:t>Drop file into</a:t>
-            </a:r>
-            <a:endParaRPr lang="en-US" sz="1100" dirty="0"/>
-          </a:p>
-          <a:p>
-            <a:pPr algn="ctr" indent="0" marL="0">
-              <a:buNone/>
-            </a:pPr>
-            <a:r>
-              <a:rPr lang="en-US" sz="1100" spc="100" kern="0" dirty="0">
-                <a:solidFill>
-                  <a:srgbClr val="8E8676"/>
-                </a:solidFill>
-                <a:latin typeface="Consolas" pitchFamily="34" charset="0"/>
-                <a:ea typeface="Consolas" pitchFamily="34" charset="-122"/>
-                <a:cs typeface="Consolas" pitchFamily="34" charset="-120"/>
-              </a:rPr>
-              <a:t>presentation/screenshots/</a:t>
-            </a:r>
-            <a:endParaRPr lang="en-US" sz="1100" dirty="0"/>
-          </a:p>
-        </p:txBody>
-      </p:sp>
-      <p:sp>
-        <p:nvSpPr>
-          <p:cNvPr id="9" name="Text 7"/>
+        </p:spPr>
+      </p:pic>
+      <p:sp>
+        <p:nvSpPr>
+          <p:cNvPr id="8" name="Text 5"/>
           <p:cNvSpPr/>
           <p:nvPr/>
         </p:nvSpPr>
@@ -15669,7 +14699,7 @@
       </p:sp>
       <p:sp>
         <p:nvSpPr>
-          <p:cNvPr id="10" name="Text 8"/>
+          <p:cNvPr id="9" name="Text 6"/>
           <p:cNvSpPr/>
           <p:nvPr/>
         </p:nvSpPr>
@@ -15708,7 +14738,7 @@
       </p:sp>
       <p:sp>
         <p:nvSpPr>
-          <p:cNvPr id="11" name="Text 9"/>
+          <p:cNvPr id="10" name="Text 7"/>
           <p:cNvSpPr/>
           <p:nvPr/>
         </p:nvSpPr>
